--- a/marketing/Hotels-In-Alibaug-App-Demo-English.pptx
+++ b/marketing/Hotels-In-Alibaug-App-Demo-English.pptx
@@ -4660,7 +4660,7 @@
           <p:cNvPr id="4" name="TextBox 3">
             <a:extLst>
               <a:ext uri="{FF2B5EF4-FFF2-40B4-BE49-F238E27FC236}">
-                <a16:creationId xmlns:a16="http://schemas.microsoft.com/office/drawing/2014/main" id="{1A28754B-750F-F4F6-1F94-5585A0EE3E96}"/>
+                <a16:creationId xmlns:a16="http://schemas.microsoft.com/office/drawing/2014/main" id="{6FE3A8DC-5367-DF25-369D-4D60757D1E40}"/>
               </a:ext>
             </a:extLst>
           </p:cNvPr>
